--- a/assets/powerpoints/module-n2-bonjour/A3-bonjour-bonsoir-bonne-journee.pptx
+++ b/assets/powerpoints/module-n2-bonjour/A3-bonjour-bonsoir-bonne-journee.pptx
@@ -9522,7 +9522,25 @@
                 </a:solidFill>
                 <a:latin typeface="Verdana"/>
               </a:rPr>
-              <a:t>Ce n'est pas un « au revoir ». À un commis, à huit heures du soir, on dit « &lt;b&gt;bonne soirée&lt;/b&gt; ». « Bonne nuit » se garde pour la famille, sur le pas de la chambre.</a:t>
+              <a:t>Ce n'est pas un « au revoir ». À un commis, à huit heures du soir, on dit « </a:t>
+            </a:r>
+            <a:r>
+              <a:rPr sz="2000" b="1" i="0">
+                <a:solidFill>
+                  <a:srgbClr val="4B4F52"/>
+                </a:solidFill>
+                <a:latin typeface="Verdana"/>
+              </a:rPr>
+              <a:t>bonne soirée</a:t>
+            </a:r>
+            <a:r>
+              <a:rPr sz="2000" b="0" i="0">
+                <a:solidFill>
+                  <a:srgbClr val="4B4F52"/>
+                </a:solidFill>
+                <a:latin typeface="Verdana"/>
+              </a:rPr>
+              <a:t> ». « Bonne nuit » se garde pour la famille, sur le pas de la chambre.</a:t>
             </a:r>
           </a:p>
         </p:txBody>
